--- a/docs/Group Meeting/2026.1.27.pptx
+++ b/docs/Group Meeting/2026.1.27.pptx
@@ -302,7 +302,7 @@
           <a:p>
             <a:fld id="{EB0979D2-BE73-4D04-B6D3-8EC55C29E0AA}" type="datetimeFigureOut">
               <a:rPr lang="zh-SG" altLang="en-US" smtClean="0"/>
-              <a:t>27/1/2026</a:t>
+              <a:t>3/3/2026</a:t>
             </a:fld>
             <a:endParaRPr lang="zh-SG" altLang="en-US"/>
           </a:p>
@@ -502,7 +502,7 @@
           <a:p>
             <a:fld id="{EB0979D2-BE73-4D04-B6D3-8EC55C29E0AA}" type="datetimeFigureOut">
               <a:rPr lang="zh-SG" altLang="en-US" smtClean="0"/>
-              <a:t>27/1/2026</a:t>
+              <a:t>3/3/2026</a:t>
             </a:fld>
             <a:endParaRPr lang="zh-SG" altLang="en-US"/>
           </a:p>
@@ -712,7 +712,7 @@
           <a:p>
             <a:fld id="{EB0979D2-BE73-4D04-B6D3-8EC55C29E0AA}" type="datetimeFigureOut">
               <a:rPr lang="zh-SG" altLang="en-US" smtClean="0"/>
-              <a:t>27/1/2026</a:t>
+              <a:t>3/3/2026</a:t>
             </a:fld>
             <a:endParaRPr lang="zh-SG" altLang="en-US"/>
           </a:p>
@@ -912,7 +912,7 @@
           <a:p>
             <a:fld id="{EB0979D2-BE73-4D04-B6D3-8EC55C29E0AA}" type="datetimeFigureOut">
               <a:rPr lang="zh-SG" altLang="en-US" smtClean="0"/>
-              <a:t>27/1/2026</a:t>
+              <a:t>3/3/2026</a:t>
             </a:fld>
             <a:endParaRPr lang="zh-SG" altLang="en-US"/>
           </a:p>
@@ -1188,7 +1188,7 @@
           <a:p>
             <a:fld id="{EB0979D2-BE73-4D04-B6D3-8EC55C29E0AA}" type="datetimeFigureOut">
               <a:rPr lang="zh-SG" altLang="en-US" smtClean="0"/>
-              <a:t>27/1/2026</a:t>
+              <a:t>3/3/2026</a:t>
             </a:fld>
             <a:endParaRPr lang="zh-SG" altLang="en-US"/>
           </a:p>
@@ -1456,7 +1456,7 @@
           <a:p>
             <a:fld id="{EB0979D2-BE73-4D04-B6D3-8EC55C29E0AA}" type="datetimeFigureOut">
               <a:rPr lang="zh-SG" altLang="en-US" smtClean="0"/>
-              <a:t>27/1/2026</a:t>
+              <a:t>3/3/2026</a:t>
             </a:fld>
             <a:endParaRPr lang="zh-SG" altLang="en-US"/>
           </a:p>
@@ -1871,7 +1871,7 @@
           <a:p>
             <a:fld id="{EB0979D2-BE73-4D04-B6D3-8EC55C29E0AA}" type="datetimeFigureOut">
               <a:rPr lang="zh-SG" altLang="en-US" smtClean="0"/>
-              <a:t>27/1/2026</a:t>
+              <a:t>3/3/2026</a:t>
             </a:fld>
             <a:endParaRPr lang="zh-SG" altLang="en-US"/>
           </a:p>
@@ -2013,7 +2013,7 @@
           <a:p>
             <a:fld id="{EB0979D2-BE73-4D04-B6D3-8EC55C29E0AA}" type="datetimeFigureOut">
               <a:rPr lang="zh-SG" altLang="en-US" smtClean="0"/>
-              <a:t>27/1/2026</a:t>
+              <a:t>3/3/2026</a:t>
             </a:fld>
             <a:endParaRPr lang="zh-SG" altLang="en-US"/>
           </a:p>
@@ -2126,7 +2126,7 @@
           <a:p>
             <a:fld id="{EB0979D2-BE73-4D04-B6D3-8EC55C29E0AA}" type="datetimeFigureOut">
               <a:rPr lang="zh-SG" altLang="en-US" smtClean="0"/>
-              <a:t>27/1/2026</a:t>
+              <a:t>3/3/2026</a:t>
             </a:fld>
             <a:endParaRPr lang="zh-SG" altLang="en-US"/>
           </a:p>
@@ -2439,7 +2439,7 @@
           <a:p>
             <a:fld id="{EB0979D2-BE73-4D04-B6D3-8EC55C29E0AA}" type="datetimeFigureOut">
               <a:rPr lang="zh-SG" altLang="en-US" smtClean="0"/>
-              <a:t>27/1/2026</a:t>
+              <a:t>3/3/2026</a:t>
             </a:fld>
             <a:endParaRPr lang="zh-SG" altLang="en-US"/>
           </a:p>
@@ -2728,7 +2728,7 @@
           <a:p>
             <a:fld id="{EB0979D2-BE73-4D04-B6D3-8EC55C29E0AA}" type="datetimeFigureOut">
               <a:rPr lang="zh-SG" altLang="en-US" smtClean="0"/>
-              <a:t>27/1/2026</a:t>
+              <a:t>3/3/2026</a:t>
             </a:fld>
             <a:endParaRPr lang="zh-SG" altLang="en-US"/>
           </a:p>
@@ -2971,7 +2971,7 @@
           <a:p>
             <a:fld id="{EB0979D2-BE73-4D04-B6D3-8EC55C29E0AA}" type="datetimeFigureOut">
               <a:rPr lang="zh-SG" altLang="en-US" smtClean="0"/>
-              <a:t>27/1/2026</a:t>
+              <a:t>3/3/2026</a:t>
             </a:fld>
             <a:endParaRPr lang="zh-SG" altLang="en-US"/>
           </a:p>
@@ -4575,7 +4575,7 @@
               <a:t>端口</a:t>
             </a:r>
             <a:r>
-              <a:rPr lang="en-US" altLang="zh-CN"/>
+              <a:rPr lang="en-US" altLang="zh-CN" dirty="0"/>
               <a:t>2)</a:t>
             </a:r>
             <a:r>
